--- a/marketing/wakemed/AIWIZN_WakeMed_Clinical_Partnership_Deck.pptx
+++ b/marketing/wakemed/AIWIZN_WakeMed_Clinical_Partnership_Deck.pptx
@@ -7617,7 +7617,7 @@
                 <a:ea typeface="Georgia" pitchFamily="34" charset="-122"/>
                 <a:cs typeface="Georgia" pitchFamily="34" charset="-120"/>
               </a:rPr>
-              <a:t>Sue Cornacchia</a:t>
+              <a:t/>
             </a:r>
             <a:endParaRPr lang="en-US" sz="1200" dirty="0"/>
           </a:p>
@@ -7656,7 +7656,7 @@
                 <a:ea typeface="Georgia" pitchFamily="34" charset="-122"/>
                 <a:cs typeface="Georgia" pitchFamily="34" charset="-120"/>
               </a:rPr>
-              <a:t>Clinical Advisor · Patient Care Onboarding</a:t>
+              <a:t/>
             </a:r>
             <a:endParaRPr lang="en-US" sz="850" dirty="0"/>
           </a:p>
@@ -7696,7 +7696,7 @@
                 <a:ea typeface="Georgia" pitchFamily="34" charset="-122"/>
                 <a:cs typeface="Georgia" pitchFamily="34" charset="-120"/>
               </a:rPr>
-              <a:t>Care-support workforce design (CNA / PCT / PCA scope)</a:t>
+              <a:t/>
             </a:r>
             <a:endParaRPr lang="en-US" sz="850" dirty="0"/>
           </a:p>
@@ -7714,7 +7714,7 @@
                 <a:ea typeface="Georgia" pitchFamily="34" charset="-122"/>
                 <a:cs typeface="Georgia" pitchFamily="34" charset="-120"/>
               </a:rPr>
-              <a:t>Bedside-readiness frameworks &amp; competency rubrics</a:t>
+              <a:t/>
             </a:r>
             <a:endParaRPr lang="en-US" sz="850" dirty="0"/>
           </a:p>
@@ -7732,7 +7732,7 @@
                 <a:ea typeface="Georgia" pitchFamily="34" charset="-122"/>
                 <a:cs typeface="Georgia" pitchFamily="34" charset="-120"/>
               </a:rPr>
-              <a:t>Patient-care onboarding engine clinical lead</a:t>
+              <a:t/>
             </a:r>
             <a:endParaRPr lang="en-US" sz="850" dirty="0"/>
           </a:p>
@@ -7771,7 +7771,7 @@
                 <a:ea typeface="Georgia" pitchFamily="34" charset="-122"/>
                 <a:cs typeface="Georgia" pitchFamily="34" charset="-120"/>
               </a:rPr>
-              <a:t>Sourced from aiwizn.com/team. Sue Cornacchia added as Clinical Advisor for the Patient Care Onboarding engine. Lynn Kenyon (Duke) held for the next revision pending Duke / WakeMed engagement scoping.</a:t>
+              <a:t>Sourced from aiwizn.com/team. Lynn Kenyon (Duke) held pending Duke / WakeMed engagement scoping.  added as Clinical Advisor for the Patient Care Onboarding engine. Lynn Kenyon (Duke) held for the next revision pending Duke / WakeMed engagement scoping.</a:t>
             </a:r>
             <a:endParaRPr lang="en-US" sz="900" dirty="0"/>
           </a:p>

--- a/marketing/wakemed/AIWIZN_WakeMed_Clinical_Partnership_Deck.pptx
+++ b/marketing/wakemed/AIWIZN_WakeMed_Clinical_Partnership_Deck.pptx
@@ -11240,7 +11240,7 @@
                 <a:ea typeface="Georgia" pitchFamily="34" charset="-122"/>
                 <a:cs typeface="Georgia" pitchFamily="34" charset="-120"/>
               </a:rPr>
-              <a:t>Two decades</a:t>
+              <a:t>21 years</a:t>
             </a:r>
             <a:endParaRPr lang="en-US" sz="3800" dirty="0"/>
           </a:p>
@@ -11626,7 +11626,7 @@
                 <a:ea typeface="Georgia" pitchFamily="34" charset="-122"/>
                 <a:cs typeface="Georgia" pitchFamily="34" charset="-120"/>
               </a:rPr>
-              <a:t>“We didn't build AIWIZN in response to a market trend. We built it because 20 years of research told us exactly what was missing — and why only immersive, agentic, data-driven simulation closes the gap.”</a:t>
+              <a:t>“We didn't build AIWIZN in response to a market trend. We built it because 21 years of research told us exactly what was missing — and why only immersive, agentic, data-driven simulation closes the gap.”</a:t>
             </a:r>
             <a:endParaRPr lang="en-US" sz="1300" dirty="0"/>
           </a:p>
@@ -11807,7 +11807,7 @@
                 <a:ea typeface="Georgia" pitchFamily="34" charset="-122"/>
                 <a:cs typeface="Georgia" pitchFamily="34" charset="-120"/>
               </a:rPr>
-              <a:t>20 years applied to nursing.</a:t>
+              <a:t>21 years applied to nursing.</a:t>
             </a:r>
             <a:endParaRPr lang="en-US" sz="3600" dirty="0"/>
           </a:p>
@@ -13036,7 +13036,7 @@
                 <a:ea typeface="Georgia" pitchFamily="34" charset="-122"/>
                 <a:cs typeface="Georgia" pitchFamily="34" charset="-120"/>
               </a:rPr>
-              <a:t>“We didn't build AIWIZN in response to a market trend — 20 years of research told us exactly what was missing.”</a:t>
+              <a:t>“We didn't build AIWIZN in response to a market trend — 21 years of research told us exactly what was missing.”</a:t>
             </a:r>
             <a:endParaRPr lang="en-US" sz="1300" dirty="0"/>
           </a:p>
@@ -13320,7 +13320,7 @@
                 <a:ea typeface="Georgia" pitchFamily="34" charset="-122"/>
                 <a:cs typeface="Georgia" pitchFamily="34" charset="-120"/>
               </a:rPr>
-              <a:t>25-year Aten lineage</a:t>
+              <a:t>21-year Aten lineage</a:t>
             </a:r>
             <a:endParaRPr lang="en-US" sz="1400" dirty="0"/>
           </a:p>
@@ -13847,7 +13847,7 @@
                 <a:ea typeface="Georgia" pitchFamily="34" charset="-122"/>
                 <a:cs typeface="Georgia" pitchFamily="34" charset="-120"/>
               </a:rPr>
-              <a:t>“We didn't build AIWIZN in response to a market trend. 20 years of research told us exactly what was missing.”</a:t>
+              <a:t>“We didn't build AIWIZN in response to a market trend. 21 years of research told us exactly what was missing.”</a:t>
             </a:r>
             <a:endParaRPr lang="en-US" sz="1300" dirty="0"/>
           </a:p>
